--- a/tutorium2/Tutorium2.pptx
+++ b/tutorium2/Tutorium2.pptx
@@ -25117,13 +25117,7 @@
               <a:rPr lang="en-GB" sz="1600" b="1" dirty="0">
                 <a:hlinkClick r:id="rId2"/>
               </a:rPr>
-              <a:t>token_</a:t>
-            </a:r>
-            <a:r>
-              <a:rPr lang="en-GB" sz="1600" b="1" dirty="0">
-                <a:hlinkClick r:id="rId3"/>
-              </a:rPr>
-              <a:t>parsing</a:t>
+              <a:t>token_parsing</a:t>
             </a:r>
             <a:r>
               <a:rPr lang="en-DE" sz="1600" b="1" dirty="0">
